--- a/dataset/guides_final/SYS/manual/IT-SYS-002-M_사내 시스템 성능 저하 처리 매뉴얼.pptx
+++ b/dataset/guides_final/SYS/manual/IT-SYS-002-M_사내 시스템 성능 저하 처리 매뉴얼.pptx
@@ -33714,7 +33714,7 @@
                 <a:ea typeface="Malgun Gothic"/>
                 <a:cs typeface="Malgun Gothic"/>
               </a:rPr>
-              <a:t>티켓: 담당자 조치가 필요한 건. 담당팀에 배정하고 상태를 RDY → IP → FIN → CLS 으로 관리한다.</a:t>
+              <a:t>티켓: 담당자 조치가 필요한 건. 담당팀에 배정하고 상태를 RDY → WIP → FIN → CLS 으로 관리한다.</a:t>
             </a:r>
           </a:p>
         </p:txBody>

--- a/dataset/guides_final/SYS/manual/IT-SYS-002-M_사내 시스템 성능 저하 처리 매뉴얼.pptx
+++ b/dataset/guides_final/SYS/manual/IT-SYS-002-M_사내 시스템 성능 저하 처리 매뉴얼.pptx
@@ -3236,7 +3236,7 @@
                 <a:ea typeface="Malgun Gothic"/>
                 <a:cs typeface="Malgun Gothic"/>
               </a:rPr>
-              <a:t>한화시스템 ICT IT 담당자 매뉴얼 · 사내 시스템</a:t>
+              <a:t>가상 ICT 기업 IT 담당자 매뉴얼 · 사내 시스템</a:t>
             </a:r>
           </a:p>
         </p:txBody>
@@ -3515,7 +3515,7 @@
                 <a:ea typeface="Malgun Gothic"/>
                 <a:cs typeface="Malgun Gothic"/>
               </a:rPr>
-              <a:t>© HANWHA SYSTEMS ICT · IT-SYS-002-M · 사내 제한</a:t>
+              <a:t>© 가상 ICT 기업 · IT-SYS-002-M · 사내 제한</a:t>
             </a:r>
           </a:p>
         </p:txBody>
@@ -6037,7 +6037,7 @@
                 <a:ea typeface="Malgun Gothic"/>
                 <a:cs typeface="Malgun Gothic"/>
               </a:rPr>
-              <a:t>© HANWHA SYSTEMS ICT · IT-SYS-002-M · 사내 제한</a:t>
+              <a:t>© 가상 ICT 기업 · IT-SYS-002-M · 사내 제한</a:t>
             </a:r>
           </a:p>
         </p:txBody>
@@ -8559,7 +8559,7 @@
                 <a:ea typeface="Malgun Gothic"/>
                 <a:cs typeface="Malgun Gothic"/>
               </a:rPr>
-              <a:t>© HANWHA SYSTEMS ICT · IT-SYS-002-M · 사내 제한</a:t>
+              <a:t>© 가상 ICT 기업 · IT-SYS-002-M · 사내 제한</a:t>
             </a:r>
           </a:p>
         </p:txBody>
@@ -11081,7 +11081,7 @@
                 <a:ea typeface="Malgun Gothic"/>
                 <a:cs typeface="Malgun Gothic"/>
               </a:rPr>
-              <a:t>© HANWHA SYSTEMS ICT · IT-SYS-002-M · 사내 제한</a:t>
+              <a:t>© 가상 ICT 기업 · IT-SYS-002-M · 사내 제한</a:t>
             </a:r>
           </a:p>
         </p:txBody>
@@ -13603,7 +13603,7 @@
                 <a:ea typeface="Malgun Gothic"/>
                 <a:cs typeface="Malgun Gothic"/>
               </a:rPr>
-              <a:t>© HANWHA SYSTEMS ICT · IT-SYS-002-M · 사내 제한</a:t>
+              <a:t>© 가상 ICT 기업 · IT-SYS-002-M · 사내 제한</a:t>
             </a:r>
           </a:p>
         </p:txBody>
@@ -16125,7 +16125,7 @@
                 <a:ea typeface="Malgun Gothic"/>
                 <a:cs typeface="Malgun Gothic"/>
               </a:rPr>
-              <a:t>© HANWHA SYSTEMS ICT · IT-SYS-002-M · 사내 제한</a:t>
+              <a:t>© 가상 ICT 기업 · IT-SYS-002-M · 사내 제한</a:t>
             </a:r>
           </a:p>
         </p:txBody>
@@ -18765,7 +18765,7 @@
                 <a:ea typeface="Malgun Gothic"/>
                 <a:cs typeface="Malgun Gothic"/>
               </a:rPr>
-              <a:t>© HANWHA SYSTEMS ICT · IT-SYS-002-M · 사내 제한</a:t>
+              <a:t>© 가상 ICT 기업 · IT-SYS-002-M · 사내 제한</a:t>
             </a:r>
           </a:p>
         </p:txBody>
@@ -21287,7 +21287,7 @@
                 <a:ea typeface="Malgun Gothic"/>
                 <a:cs typeface="Malgun Gothic"/>
               </a:rPr>
-              <a:t>© HANWHA SYSTEMS ICT · IT-SYS-002-M · 사내 제한</a:t>
+              <a:t>© 가상 ICT 기업 · IT-SYS-002-M · 사내 제한</a:t>
             </a:r>
           </a:p>
         </p:txBody>
@@ -21535,7 +21535,7 @@
                 <a:ea typeface="Malgun Gothic"/>
                 <a:cs typeface="Malgun Gothic"/>
               </a:rPr>
-              <a:t>© HANWHA SYSTEMS ICT · IT-SYS-002-M · 사내 제한</a:t>
+              <a:t>© 가상 ICT 기업 · IT-SYS-002-M · 사내 제한</a:t>
             </a:r>
           </a:p>
         </p:txBody>
@@ -22194,7 +22194,7 @@
                 <a:ea typeface="Malgun Gothic"/>
                 <a:cs typeface="Malgun Gothic"/>
               </a:rPr>
-              <a:t>© HANWHA SYSTEMS ICT · IT-SYS-002-M · 사내 제한</a:t>
+              <a:t>© 가상 ICT 기업 · IT-SYS-002-M · 사내 제한</a:t>
             </a:r>
           </a:p>
         </p:txBody>
@@ -22442,7 +22442,7 @@
                 <a:ea typeface="Malgun Gothic"/>
                 <a:cs typeface="Malgun Gothic"/>
               </a:rPr>
-              <a:t>© HANWHA SYSTEMS ICT · IT-SYS-002-M · 사내 제한</a:t>
+              <a:t>© 가상 ICT 기업 · IT-SYS-002-M · 사내 제한</a:t>
             </a:r>
           </a:p>
         </p:txBody>
@@ -24085,7 +24085,7 @@
                 <a:ea typeface="Malgun Gothic"/>
                 <a:cs typeface="Malgun Gothic"/>
               </a:rPr>
-              <a:t>© HANWHA SYSTEMS ICT · IT-SYS-002-M · 사내 제한</a:t>
+              <a:t>© 가상 ICT 기업 · IT-SYS-002-M · 사내 제한</a:t>
             </a:r>
           </a:p>
         </p:txBody>
@@ -25113,7 +25113,7 @@
                 <a:ea typeface="Malgun Gothic"/>
                 <a:cs typeface="Malgun Gothic"/>
               </a:rPr>
-              <a:t>© HANWHA SYSTEMS ICT · IT-SYS-002-M · 사내 제한</a:t>
+              <a:t>© 가상 ICT 기업 · IT-SYS-002-M · 사내 제한</a:t>
             </a:r>
           </a:p>
         </p:txBody>
@@ -25361,7 +25361,7 @@
                 <a:ea typeface="Malgun Gothic"/>
                 <a:cs typeface="Malgun Gothic"/>
               </a:rPr>
-              <a:t>© HANWHA SYSTEMS ICT · IT-SYS-002-M · 사내 제한</a:t>
+              <a:t>© 가상 ICT 기업 · IT-SYS-002-M · 사내 제한</a:t>
             </a:r>
           </a:p>
         </p:txBody>
@@ -26053,7 +26053,7 @@
                 <a:ea typeface="Malgun Gothic"/>
                 <a:cs typeface="Malgun Gothic"/>
               </a:rPr>
-              <a:t>© HANWHA SYSTEMS ICT · IT-SYS-002-M · 사내 제한</a:t>
+              <a:t>© 가상 ICT 기업 · IT-SYS-002-M · 사내 제한</a:t>
             </a:r>
           </a:p>
         </p:txBody>
@@ -27030,7 +27030,7 @@
                 <a:ea typeface="Malgun Gothic"/>
                 <a:cs typeface="Malgun Gothic"/>
               </a:rPr>
-              <a:t>© HANWHA SYSTEMS ICT · IT-SYS-002-M · 사내 제한</a:t>
+              <a:t>© 가상 ICT 기업 · IT-SYS-002-M · 사내 제한</a:t>
             </a:r>
           </a:p>
         </p:txBody>
@@ -28176,7 +28176,7 @@
                 <a:ea typeface="Malgun Gothic"/>
                 <a:cs typeface="Malgun Gothic"/>
               </a:rPr>
-              <a:t>© HANWHA SYSTEMS ICT · IT-SYS-002-M · 사내 제한</a:t>
+              <a:t>© 가상 ICT 기업 · IT-SYS-002-M · 사내 제한</a:t>
             </a:r>
           </a:p>
         </p:txBody>
@@ -28424,7 +28424,7 @@
                 <a:ea typeface="Malgun Gothic"/>
                 <a:cs typeface="Malgun Gothic"/>
               </a:rPr>
-              <a:t>© HANWHA SYSTEMS ICT · IT-SYS-002-M · 사내 제한</a:t>
+              <a:t>© 가상 ICT 기업 · IT-SYS-002-M · 사내 제한</a:t>
             </a:r>
           </a:p>
         </p:txBody>
@@ -29434,7 +29434,7 @@
                 <a:ea typeface="Malgun Gothic"/>
                 <a:cs typeface="Malgun Gothic"/>
               </a:rPr>
-              <a:t>© HANWHA SYSTEMS ICT · IT-SYS-002-M · 사내 제한</a:t>
+              <a:t>© 가상 ICT 기업 · IT-SYS-002-M · 사내 제한</a:t>
             </a:r>
           </a:p>
         </p:txBody>
@@ -29682,7 +29682,7 @@
                 <a:ea typeface="Malgun Gothic"/>
                 <a:cs typeface="Malgun Gothic"/>
               </a:rPr>
-              <a:t>© HANWHA SYSTEMS ICT · IT-SYS-002-M · 사내 제한</a:t>
+              <a:t>© 가상 ICT 기업 · IT-SYS-002-M · 사내 제한</a:t>
             </a:r>
           </a:p>
         </p:txBody>
@@ -34090,7 +34090,7 @@
                 <a:ea typeface="Malgun Gothic"/>
                 <a:cs typeface="Malgun Gothic"/>
               </a:rPr>
-              <a:t>© HANWHA SYSTEMS ICT · IT-SYS-002-M · 사내 제한</a:t>
+              <a:t>© 가상 ICT 기업 · IT-SYS-002-M · 사내 제한</a:t>
             </a:r>
           </a:p>
         </p:txBody>
@@ -34338,7 +34338,7 @@
                 <a:ea typeface="Malgun Gothic"/>
                 <a:cs typeface="Malgun Gothic"/>
               </a:rPr>
-              <a:t>© HANWHA SYSTEMS ICT · IT-SYS-002-M · 사내 제한</a:t>
+              <a:t>© 가상 ICT 기업 · IT-SYS-002-M · 사내 제한</a:t>
             </a:r>
           </a:p>
         </p:txBody>
@@ -37236,7 +37236,7 @@
                 <a:ea typeface="Malgun Gothic"/>
                 <a:cs typeface="Malgun Gothic"/>
               </a:rPr>
-              <a:t>© HANWHA SYSTEMS ICT · IT-SYS-002-M · 사내 제한</a:t>
+              <a:t>© 가상 ICT 기업 · IT-SYS-002-M · 사내 제한</a:t>
             </a:r>
           </a:p>
         </p:txBody>
